--- a/docs/Z+ User Guide.pptx
+++ b/docs/Z+ User Guide.pptx
@@ -4468,6 +4468,27 @@
                 <a:ea typeface="Calibri" pitchFamily="34" charset="-122"/>
                 <a:cs typeface="Calibri" pitchFamily="34" charset="-120"/>
               </a:rPr>
+              <a:t>Invite by email — invitees get the details and a join link</a:t>
+            </a:r>
+            <a:endParaRPr lang="en-US" sz="1100" dirty="0"/>
+          </a:p>
+          <a:p>
+            <a:pPr marL="342900" indent="-342900">
+              <a:spcAft>
+                <a:spcPts val="600"/>
+              </a:spcAft>
+              <a:buSzPct val="100000"/>
+              <a:buChar char="•"/>
+            </a:pPr>
+            <a:r>
+              <a:rPr lang="en-US" sz="1100" dirty="0">
+                <a:solidFill>
+                  <a:srgbClr val="C9CED6"/>
+                </a:solidFill>
+                <a:latin typeface="Calibri" pitchFamily="34" charset="0"/>
+                <a:ea typeface="Calibri" pitchFamily="34" charset="-122"/>
+                <a:cs typeface="Calibri" pitchFamily="34" charset="-120"/>
+              </a:rPr>
               <a:t>Appears under “Your meetings” — click Start when it's time</a:t>
             </a:r>
             <a:endParaRPr lang="en-US" sz="1100" dirty="0"/>
@@ -5544,6 +5565,27 @@
             </a:r>
             <a:endParaRPr lang="en-US" sz="1150" dirty="0"/>
           </a:p>
+          <a:p>
+            <a:pPr marL="342900" indent="-342900">
+              <a:spcAft>
+                <a:spcPts val="600"/>
+              </a:spcAft>
+              <a:buSzPct val="100000"/>
+              <a:buChar char="•"/>
+            </a:pPr>
+            <a:r>
+              <a:rPr lang="en-US" sz="1150" dirty="0">
+                <a:solidFill>
+                  <a:srgbClr val="C9CED6"/>
+                </a:solidFill>
+                <a:latin typeface="Calibri" pitchFamily="34" charset="0"/>
+                <a:ea typeface="Calibri" pitchFamily="34" charset="-122"/>
+                <a:cs typeface="Calibri" pitchFamily="34" charset="-120"/>
+              </a:rPr>
+              <a:t>🔒 End-to-end encrypted — the server only ever sees ciphertext.</a:t>
+            </a:r>
+            <a:endParaRPr lang="en-US" sz="1150" dirty="0"/>
+          </a:p>
         </p:txBody>
       </p:sp>
       <p:sp>
@@ -7667,6 +7709,27 @@
                 <a:cs typeface="Calibri" pitchFamily="34" charset="-120"/>
               </a:rPr>
               <a:t>Leaving a meeting doesn't end it — you can rejoin with the same ID.</a:t>
+            </a:r>
+            <a:endParaRPr lang="en-US" sz="1100" dirty="0"/>
+          </a:p>
+          <a:p>
+            <a:pPr marL="342900" indent="-342900">
+              <a:spcAft>
+                <a:spcPts val="600"/>
+              </a:spcAft>
+              <a:buSzPct val="100000"/>
+              <a:buChar char="•"/>
+            </a:pPr>
+            <a:r>
+              <a:rPr lang="en-US" sz="1100" dirty="0">
+                <a:solidFill>
+                  <a:srgbClr val="C9CED6"/>
+                </a:solidFill>
+                <a:latin typeface="Calibri" pitchFamily="34" charset="0"/>
+                <a:ea typeface="Calibri" pitchFamily="34" charset="-122"/>
+                <a:cs typeface="Calibri" pitchFamily="34" charset="-120"/>
+              </a:rPr>
+              <a:t>Audio, video and chat are end-to-end encrypted.</a:t>
             </a:r>
             <a:endParaRPr lang="en-US" sz="1100" dirty="0"/>
           </a:p>

--- a/docs/Z+ User Guide.pptx
+++ b/docs/Z+ User Guide.pptx
@@ -6978,7 +6978,7 @@
                 <a:ea typeface="Calibri" pitchFamily="34" charset="-122"/>
                 <a:cs typeface="Calibri" pitchFamily="34" charset="-120"/>
               </a:rPr>
-              <a:t>The console client — zplus-client</a:t>
+              <a:t>The desktop app — zplus-client</a:t>
             </a:r>
             <a:endParaRPr lang="en-US" sz="1300" dirty="0"/>
           </a:p>
@@ -7021,7 +7021,7 @@
                 <a:ea typeface="Calibri" pitchFamily="34" charset="-122"/>
                 <a:cs typeface="Calibri" pitchFamily="34" charset="-120"/>
               </a:rPr>
-              <a:t>One binary, nothing to install: chmod +x zplus-client, then run it.</a:t>
+              <a:t>One file, nothing to install: chmod +x zplus-client, then run it.</a:t>
             </a:r>
             <a:endParaRPr lang="en-US" sz="1100" dirty="0"/>
           </a:p>
@@ -7042,7 +7042,7 @@
                 <a:ea typeface="Calibri" pitchFamily="34" charset="-122"/>
                 <a:cs typeface="Calibri" pitchFamily="34" charset="-120"/>
               </a:rPr>
-              <a:t>Sign in with your usual account (or --register to create one).</a:t>
+              <a:t>The same look and sign-in as the Windows app — same account, same server.</a:t>
             </a:r>
             <a:endParaRPr lang="en-US" sz="1100" dirty="0"/>
           </a:p>
@@ -7063,7 +7063,7 @@
                 <a:ea typeface="Calibri" pitchFamily="34" charset="-122"/>
                 <a:cs typeface="Calibri" pitchFamily="34" charset="-120"/>
               </a:rPr>
-              <a:t>Start instant meetings, join by meeting ID, chat with everyone.</a:t>
+              <a:t>Start, join and schedule meetings (with email invitations).</a:t>
             </a:r>
             <a:endParaRPr lang="en-US" sz="1100" dirty="0"/>
           </a:p>
@@ -7084,7 +7084,7 @@
                 <a:ea typeface="Calibri" pitchFamily="34" charset="-122"/>
                 <a:cs typeface="Calibri" pitchFamily="34" charset="-120"/>
               </a:rPr>
-              <a:t>Commands: /who participants · /msg &lt;name&gt; &lt;text&gt; private · /leave · /end (host)</a:t>
+              <a:t>Live participant list with host controls, plus end-to-end encrypted chat.</a:t>
             </a:r>
             <a:endParaRPr lang="en-US" sz="1100" dirty="0"/>
           </a:p>
@@ -7107,7 +7107,7 @@
             </a:avLst>
           </a:prstGeom>
           <a:solidFill>
-            <a:srgbClr val="121317"/>
+            <a:srgbClr val="24262E"/>
           </a:solidFill>
           <a:ln/>
           <a:effectLst>
@@ -7121,14 +7121,154 @@
       </p:sp>
       <p:sp>
         <p:nvSpPr>
-          <p:cNvPr id="9" name="Text 6"/>
-          <p:cNvSpPr/>
-          <p:nvPr/>
-        </p:nvSpPr>
-        <p:spPr>
-          <a:xfrm>
-            <a:off x="5212080" y="1234440"/>
-            <a:ext cx="3200400" cy="3108960"/>
+          <p:cNvPr id="9" name="Shape 6"/>
+          <p:cNvSpPr/>
+          <p:nvPr/>
+        </p:nvSpPr>
+        <p:spPr>
+          <a:xfrm>
+            <a:off x="4937760" y="1078992"/>
+            <a:ext cx="3749040" cy="329184"/>
+          </a:xfrm>
+          <a:prstGeom prst="rect">
+            <a:avLst/>
+          </a:prstGeom>
+          <a:solidFill>
+            <a:srgbClr val="1B1D22"/>
+          </a:solidFill>
+          <a:ln/>
+        </p:spPr>
+      </p:sp>
+      <p:sp>
+        <p:nvSpPr>
+          <p:cNvPr id="10" name="Text 7"/>
+          <p:cNvSpPr/>
+          <p:nvPr/>
+        </p:nvSpPr>
+        <p:spPr>
+          <a:xfrm>
+            <a:off x="5120640" y="1078992"/>
+            <a:ext cx="3017520" cy="329184"/>
+          </a:xfrm>
+          <a:prstGeom prst="rect">
+            <a:avLst/>
+          </a:prstGeom>
+          <a:noFill/>
+          <a:ln/>
+        </p:spPr>
+        <p:txBody>
+          <a:bodyPr wrap="square" lIns="0" tIns="0" rIns="0" bIns="0" rtlCol="0" anchor="ctr"/>
+          <a:lstStyle/>
+          <a:p>
+            <a:pPr indent="0" marL="0">
+              <a:buNone/>
+            </a:pPr>
+            <a:r>
+              <a:rPr lang="en-US" sz="950" dirty="0">
+                <a:solidFill>
+                  <a:srgbClr val="C9CED6"/>
+                </a:solidFill>
+                <a:latin typeface="Calibri" pitchFamily="34" charset="0"/>
+                <a:ea typeface="Calibri" pitchFamily="34" charset="-122"/>
+                <a:cs typeface="Calibri" pitchFamily="34" charset="-120"/>
+              </a:rPr>
+              <a:t>Weekly Sync — Meeting ID: 123-456-789</a:t>
+            </a:r>
+            <a:endParaRPr lang="en-US" sz="950" dirty="0"/>
+          </a:p>
+        </p:txBody>
+      </p:sp>
+      <p:sp>
+        <p:nvSpPr>
+          <p:cNvPr id="11" name="Shape 8"/>
+          <p:cNvSpPr/>
+          <p:nvPr/>
+        </p:nvSpPr>
+        <p:spPr>
+          <a:xfrm>
+            <a:off x="8485632" y="1188720"/>
+            <a:ext cx="109728" cy="109728"/>
+          </a:xfrm>
+          <a:prstGeom prst="ellipse">
+            <a:avLst/>
+          </a:prstGeom>
+          <a:solidFill>
+            <a:srgbClr val="9AA0AA"/>
+          </a:solidFill>
+          <a:ln/>
+        </p:spPr>
+      </p:sp>
+      <p:sp>
+        <p:nvSpPr>
+          <p:cNvPr id="12" name="Text 9"/>
+          <p:cNvSpPr/>
+          <p:nvPr/>
+        </p:nvSpPr>
+        <p:spPr>
+          <a:xfrm>
+            <a:off x="5120640" y="1463040"/>
+            <a:ext cx="3383280" cy="228600"/>
+          </a:xfrm>
+          <a:prstGeom prst="rect">
+            <a:avLst/>
+          </a:prstGeom>
+          <a:noFill/>
+          <a:ln/>
+        </p:spPr>
+        <p:txBody>
+          <a:bodyPr wrap="square" lIns="0" tIns="0" rIns="0" bIns="0" rtlCol="0" anchor="ctr"/>
+          <a:lstStyle/>
+          <a:p>
+            <a:pPr indent="0" marL="0">
+              <a:buNone/>
+            </a:pPr>
+            <a:r>
+              <a:rPr lang="en-US" sz="900" dirty="0">
+                <a:solidFill>
+                  <a:srgbClr val="7BE28B"/>
+                </a:solidFill>
+                <a:latin typeface="Calibri" pitchFamily="34" charset="0"/>
+                <a:ea typeface="Calibri" pitchFamily="34" charset="-122"/>
+                <a:cs typeface="Calibri" pitchFamily="34" charset="-120"/>
+              </a:rPr>
+              <a:t>🔒 End-to-end encrypted</a:t>
+            </a:r>
+            <a:endParaRPr lang="en-US" sz="900" dirty="0"/>
+          </a:p>
+        </p:txBody>
+      </p:sp>
+      <p:sp>
+        <p:nvSpPr>
+          <p:cNvPr id="13" name="Shape 10"/>
+          <p:cNvSpPr/>
+          <p:nvPr/>
+        </p:nvSpPr>
+        <p:spPr>
+          <a:xfrm>
+            <a:off x="5120640" y="1755648"/>
+            <a:ext cx="1417320" cy="2286000"/>
+          </a:xfrm>
+          <a:prstGeom prst="roundRect">
+            <a:avLst>
+              <a:gd name="adj" fmla="val 3226"/>
+            </a:avLst>
+          </a:prstGeom>
+          <a:solidFill>
+            <a:srgbClr val="2C2F38"/>
+          </a:solidFill>
+          <a:ln/>
+        </p:spPr>
+      </p:sp>
+      <p:sp>
+        <p:nvSpPr>
+          <p:cNvPr id="14" name="Text 11"/>
+          <p:cNvSpPr/>
+          <p:nvPr/>
+        </p:nvSpPr>
+        <p:spPr>
+          <a:xfrm>
+            <a:off x="5230368" y="1847088"/>
+            <a:ext cx="1234440" cy="2103120"/>
           </a:xfrm>
           <a:prstGeom prst="rect">
             <a:avLst/>
@@ -7142,198 +7282,206 @@
           <a:p>
             <a:pPr indent="0" marL="0">
               <a:spcAft>
-                <a:spcPts val="400"/>
+                <a:spcPts val="500"/>
               </a:spcAft>
               <a:buNone/>
             </a:pPr>
             <a:r>
-              <a:rPr lang="en-US" sz="1150" dirty="0">
-                <a:solidFill>
-                  <a:srgbClr val="7BE28B"/>
-                </a:solidFill>
-                <a:latin typeface="Consolas" pitchFamily="34" charset="0"/>
-                <a:ea typeface="Consolas" pitchFamily="34" charset="-122"/>
-                <a:cs typeface="Consolas" pitchFamily="34" charset="-120"/>
-              </a:rPr>
-              <a:t>$ ./zplus-client</a:t>
-            </a:r>
-            <a:endParaRPr lang="en-US" sz="1150" dirty="0"/>
+              <a:rPr lang="en-US" sz="900" b="1" dirty="0">
+                <a:solidFill>
+                  <a:srgbClr val="F2F2F2"/>
+                </a:solidFill>
+                <a:latin typeface="Calibri" pitchFamily="34" charset="0"/>
+                <a:ea typeface="Calibri" pitchFamily="34" charset="-122"/>
+                <a:cs typeface="Calibri" pitchFamily="34" charset="-120"/>
+              </a:rPr>
+              <a:t>Participants</a:t>
+            </a:r>
+            <a:endParaRPr lang="en-US" sz="900" dirty="0"/>
           </a:p>
           <a:p>
             <a:pPr indent="0" marL="0">
               <a:spcAft>
-                <a:spcPts val="400"/>
+                <a:spcPts val="500"/>
               </a:spcAft>
               <a:buNone/>
             </a:pPr>
             <a:r>
-              <a:rPr lang="en-US" sz="1150" dirty="0">
+              <a:rPr lang="en-US" sz="900" dirty="0">
                 <a:solidFill>
                   <a:srgbClr val="C9CED6"/>
                 </a:solidFill>
-                <a:latin typeface="Consolas" pitchFamily="34" charset="0"/>
-                <a:ea typeface="Consolas" pitchFamily="34" charset="-122"/>
-                <a:cs typeface="Consolas" pitchFamily="34" charset="-120"/>
-              </a:rPr>
-              <a:t>Email: linus@corp.local</a:t>
-            </a:r>
-            <a:endParaRPr lang="en-US" sz="1150" dirty="0"/>
+                <a:latin typeface="Calibri" pitchFamily="34" charset="0"/>
+                <a:ea typeface="Calibri" pitchFamily="34" charset="-122"/>
+                <a:cs typeface="Calibri" pitchFamily="34" charset="-120"/>
+              </a:rPr>
+              <a:t>Amy Chen (host)</a:t>
+            </a:r>
+            <a:endParaRPr lang="en-US" sz="900" dirty="0"/>
           </a:p>
           <a:p>
             <a:pPr indent="0" marL="0">
               <a:spcAft>
-                <a:spcPts val="400"/>
+                <a:spcPts val="500"/>
               </a:spcAft>
               <a:buNone/>
             </a:pPr>
             <a:r>
-              <a:rPr lang="en-US" sz="1150" dirty="0">
+              <a:rPr lang="en-US" sz="900" dirty="0">
                 <a:solidFill>
                   <a:srgbClr val="C9CED6"/>
                 </a:solidFill>
-                <a:latin typeface="Consolas" pitchFamily="34" charset="0"/>
-                <a:ea typeface="Consolas" pitchFamily="34" charset="-122"/>
-                <a:cs typeface="Consolas" pitchFamily="34" charset="-120"/>
-              </a:rPr>
-              <a:t>Signed in as Linus User.</a:t>
-            </a:r>
-            <a:endParaRPr lang="en-US" sz="1150" dirty="0"/>
-          </a:p>
+                <a:latin typeface="Calibri" pitchFamily="34" charset="0"/>
+                <a:ea typeface="Calibri" pitchFamily="34" charset="-122"/>
+                <a:cs typeface="Calibri" pitchFamily="34" charset="-120"/>
+              </a:rPr>
+              <a:t>Linus User (You)</a:t>
+            </a:r>
+            <a:endParaRPr lang="en-US" sz="900" dirty="0"/>
+          </a:p>
+        </p:txBody>
+      </p:sp>
+      <p:sp>
+        <p:nvSpPr>
+          <p:cNvPr id="15" name="Shape 12"/>
+          <p:cNvSpPr/>
+          <p:nvPr/>
+        </p:nvSpPr>
+        <p:spPr>
+          <a:xfrm>
+            <a:off x="6675120" y="1755648"/>
+            <a:ext cx="1828800" cy="2286000"/>
+          </a:xfrm>
+          <a:prstGeom prst="roundRect">
+            <a:avLst>
+              <a:gd name="adj" fmla="val 2500"/>
+            </a:avLst>
+          </a:prstGeom>
+          <a:solidFill>
+            <a:srgbClr val="2C2F38"/>
+          </a:solidFill>
+          <a:ln/>
+        </p:spPr>
+      </p:sp>
+      <p:sp>
+        <p:nvSpPr>
+          <p:cNvPr id="16" name="Text 13"/>
+          <p:cNvSpPr/>
+          <p:nvPr/>
+        </p:nvSpPr>
+        <p:spPr>
+          <a:xfrm>
+            <a:off x="6784848" y="1847088"/>
+            <a:ext cx="1645920" cy="2103120"/>
+          </a:xfrm>
+          <a:prstGeom prst="rect">
+            <a:avLst/>
+          </a:prstGeom>
+          <a:noFill/>
+          <a:ln/>
+        </p:spPr>
+        <p:txBody>
+          <a:bodyPr wrap="square" lIns="0" tIns="0" rIns="0" bIns="0" rtlCol="0" anchor="t"/>
+          <a:lstStyle/>
           <a:p>
             <a:pPr indent="0" marL="0">
               <a:spcAft>
-                <a:spcPts val="400"/>
+                <a:spcPts val="500"/>
               </a:spcAft>
               <a:buNone/>
             </a:pPr>
             <a:r>
-              <a:rPr lang="en-US" sz="1150" dirty="0">
-                <a:solidFill>
-                  <a:srgbClr val="7BE28B"/>
-                </a:solidFill>
-                <a:latin typeface="Consolas" pitchFamily="34" charset="0"/>
-                <a:ea typeface="Consolas" pitchFamily="34" charset="-122"/>
-                <a:cs typeface="Consolas" pitchFamily="34" charset="-120"/>
-              </a:rPr>
-              <a:t>&gt; 2</a:t>
-            </a:r>
-            <a:endParaRPr lang="en-US" sz="1150" dirty="0"/>
+              <a:rPr lang="en-US" sz="900" b="1" dirty="0">
+                <a:solidFill>
+                  <a:srgbClr val="F2F2F2"/>
+                </a:solidFill>
+                <a:latin typeface="Calibri" pitchFamily="34" charset="0"/>
+                <a:ea typeface="Calibri" pitchFamily="34" charset="-122"/>
+                <a:cs typeface="Calibri" pitchFamily="34" charset="-120"/>
+              </a:rPr>
+              <a:t>Chat</a:t>
+            </a:r>
+            <a:endParaRPr lang="en-US" sz="900" dirty="0"/>
           </a:p>
           <a:p>
             <a:pPr indent="0" marL="0">
               <a:spcAft>
-                <a:spcPts val="400"/>
+                <a:spcPts val="500"/>
               </a:spcAft>
               <a:buNone/>
             </a:pPr>
             <a:r>
-              <a:rPr lang="en-US" sz="1150" dirty="0">
+              <a:rPr lang="en-US" sz="900" dirty="0">
                 <a:solidFill>
                   <a:srgbClr val="C9CED6"/>
                 </a:solidFill>
-                <a:latin typeface="Consolas" pitchFamily="34" charset="0"/>
-                <a:ea typeface="Consolas" pitchFamily="34" charset="-122"/>
-                <a:cs typeface="Consolas" pitchFamily="34" charset="-120"/>
-              </a:rPr>
-              <a:t>Meeting ID: 123-456-789</a:t>
-            </a:r>
-            <a:endParaRPr lang="en-US" sz="1150" dirty="0"/>
+                <a:latin typeface="Calibri" pitchFamily="34" charset="0"/>
+                <a:ea typeface="Calibri" pitchFamily="34" charset="-122"/>
+                <a:cs typeface="Calibri" pitchFamily="34" charset="-120"/>
+              </a:rPr>
+              <a:t>Amy: welcome!</a:t>
+            </a:r>
+            <a:endParaRPr lang="en-US" sz="900" dirty="0"/>
           </a:p>
           <a:p>
             <a:pPr indent="0" marL="0">
               <a:spcAft>
-                <a:spcPts val="400"/>
+                <a:spcPts val="500"/>
               </a:spcAft>
               <a:buNone/>
             </a:pPr>
             <a:r>
-              <a:rPr lang="en-US" sz="1150" dirty="0">
-                <a:solidFill>
-                  <a:srgbClr val="F2F2F2"/>
-                </a:solidFill>
-                <a:latin typeface="Consolas" pitchFamily="34" charset="0"/>
-                <a:ea typeface="Consolas" pitchFamily="34" charset="-122"/>
-                <a:cs typeface="Consolas" pitchFamily="34" charset="-120"/>
-              </a:rPr>
-              <a:t>=== Weekly Sync ===</a:t>
-            </a:r>
-            <a:endParaRPr lang="en-US" sz="1150" dirty="0"/>
-          </a:p>
-          <a:p>
-            <a:pPr indent="0" marL="0">
-              <a:spcAft>
-                <a:spcPts val="400"/>
-              </a:spcAft>
-              <a:buNone/>
-            </a:pPr>
-            <a:r>
-              <a:rPr lang="en-US" sz="1150" dirty="0">
-                <a:solidFill>
-                  <a:srgbClr val="9AA0AA"/>
-                </a:solidFill>
-                <a:latin typeface="Consolas" pitchFamily="34" charset="0"/>
-                <a:ea typeface="Consolas" pitchFamily="34" charset="-122"/>
-                <a:cs typeface="Consolas" pitchFamily="34" charset="-120"/>
-              </a:rPr>
-              <a:t>* Amy Chen joined</a:t>
-            </a:r>
-            <a:endParaRPr lang="en-US" sz="1150" dirty="0"/>
-          </a:p>
-          <a:p>
-            <a:pPr indent="0" marL="0">
-              <a:spcAft>
-                <a:spcPts val="400"/>
-              </a:spcAft>
-              <a:buNone/>
-            </a:pPr>
-            <a:r>
-              <a:rPr lang="en-US" sz="1150" dirty="0">
+              <a:rPr lang="en-US" sz="900" dirty="0">
                 <a:solidFill>
                   <a:srgbClr val="C9CED6"/>
                 </a:solidFill>
-                <a:latin typeface="Consolas" pitchFamily="34" charset="0"/>
-                <a:ea typeface="Consolas" pitchFamily="34" charset="-122"/>
-                <a:cs typeface="Consolas" pitchFamily="34" charset="-120"/>
-              </a:rPr>
-              <a:t>Amy Chen: welcome!</a:t>
-            </a:r>
-            <a:endParaRPr lang="en-US" sz="1150" dirty="0"/>
-          </a:p>
-          <a:p>
-            <a:pPr indent="0" marL="0">
-              <a:spcAft>
-                <a:spcPts val="400"/>
-              </a:spcAft>
-              <a:buNone/>
-            </a:pPr>
-            <a:r>
-              <a:rPr lang="en-US" sz="1150" dirty="0">
-                <a:solidFill>
-                  <a:srgbClr val="7BE28B"/>
-                </a:solidFill>
-                <a:latin typeface="Consolas" pitchFamily="34" charset="0"/>
-                <a:ea typeface="Consolas" pitchFamily="34" charset="-122"/>
-                <a:cs typeface="Consolas" pitchFamily="34" charset="-120"/>
-              </a:rPr>
-              <a:t>&gt; hello from linux</a:t>
-            </a:r>
-            <a:endParaRPr lang="en-US" sz="1150" dirty="0"/>
-          </a:p>
-        </p:txBody>
-      </p:sp>
-      <p:sp>
-        <p:nvSpPr>
-          <p:cNvPr id="10" name="Shape 7"/>
-          <p:cNvSpPr/>
-          <p:nvPr/>
-        </p:nvSpPr>
-        <p:spPr>
-          <a:xfrm>
-            <a:off x="457200" y="4617720"/>
-            <a:ext cx="329184" cy="329184"/>
-          </a:xfrm>
-          <a:prstGeom prst="ellipse">
-            <a:avLst/>
+                <a:latin typeface="Calibri" pitchFamily="34" charset="0"/>
+                <a:ea typeface="Calibri" pitchFamily="34" charset="-122"/>
+                <a:cs typeface="Calibri" pitchFamily="34" charset="-120"/>
+              </a:rPr>
+              <a:t>You: hello from linux</a:t>
+            </a:r>
+            <a:endParaRPr lang="en-US" sz="900" dirty="0"/>
+          </a:p>
+        </p:txBody>
+      </p:sp>
+      <p:sp>
+        <p:nvSpPr>
+          <p:cNvPr id="17" name="Shape 14"/>
+          <p:cNvSpPr/>
+          <p:nvPr/>
+        </p:nvSpPr>
+        <p:spPr>
+          <a:xfrm>
+            <a:off x="5120640" y="4133088"/>
+            <a:ext cx="2743200" cy="292608"/>
+          </a:xfrm>
+          <a:prstGeom prst="roundRect">
+            <a:avLst>
+              <a:gd name="adj" fmla="val 15625"/>
+            </a:avLst>
+          </a:prstGeom>
+          <a:solidFill>
+            <a:srgbClr val="15161A"/>
+          </a:solidFill>
+          <a:ln/>
+        </p:spPr>
+      </p:sp>
+      <p:sp>
+        <p:nvSpPr>
+          <p:cNvPr id="18" name="Shape 15"/>
+          <p:cNvSpPr/>
+          <p:nvPr/>
+        </p:nvSpPr>
+        <p:spPr>
+          <a:xfrm>
+            <a:off x="7936992" y="4133088"/>
+            <a:ext cx="566928" cy="292608"/>
+          </a:xfrm>
+          <a:prstGeom prst="roundRect">
+            <a:avLst>
+              <a:gd name="adj" fmla="val 15625"/>
+            </a:avLst>
           </a:prstGeom>
           <a:solidFill>
             <a:srgbClr val="2D8CFF"/>
@@ -7341,9 +7489,68 @@
           <a:ln/>
         </p:spPr>
       </p:sp>
+      <p:sp>
+        <p:nvSpPr>
+          <p:cNvPr id="19" name="Text 16"/>
+          <p:cNvSpPr/>
+          <p:nvPr/>
+        </p:nvSpPr>
+        <p:spPr>
+          <a:xfrm>
+            <a:off x="7936992" y="4133088"/>
+            <a:ext cx="566928" cy="292608"/>
+          </a:xfrm>
+          <a:prstGeom prst="rect">
+            <a:avLst/>
+          </a:prstGeom>
+          <a:noFill/>
+          <a:ln/>
+        </p:spPr>
+        <p:txBody>
+          <a:bodyPr wrap="square" lIns="0" tIns="0" rIns="0" bIns="0" rtlCol="0" anchor="ctr"/>
+          <a:lstStyle/>
+          <a:p>
+            <a:pPr algn="ctr" indent="0" marL="0">
+              <a:buNone/>
+            </a:pPr>
+            <a:r>
+              <a:rPr lang="en-US" sz="900" b="1" dirty="0">
+                <a:solidFill>
+                  <a:srgbClr val="FFFFFF"/>
+                </a:solidFill>
+                <a:latin typeface="Calibri" pitchFamily="34" charset="0"/>
+                <a:ea typeface="Calibri" pitchFamily="34" charset="-122"/>
+                <a:cs typeface="Calibri" pitchFamily="34" charset="-120"/>
+              </a:rPr>
+              <a:t>Send</a:t>
+            </a:r>
+            <a:endParaRPr lang="en-US" sz="900" dirty="0"/>
+          </a:p>
+        </p:txBody>
+      </p:sp>
+      <p:sp>
+        <p:nvSpPr>
+          <p:cNvPr id="20" name="Shape 17"/>
+          <p:cNvSpPr/>
+          <p:nvPr/>
+        </p:nvSpPr>
+        <p:spPr>
+          <a:xfrm>
+            <a:off x="457200" y="4617720"/>
+            <a:ext cx="329184" cy="329184"/>
+          </a:xfrm>
+          <a:prstGeom prst="ellipse">
+            <a:avLst/>
+          </a:prstGeom>
+          <a:solidFill>
+            <a:srgbClr val="2D8CFF"/>
+          </a:solidFill>
+          <a:ln/>
+        </p:spPr>
+      </p:sp>
       <p:pic>
         <p:nvPicPr>
-          <p:cNvPr id="11" name="Image 1" descr="preencoded.png">    </p:cNvPr>
+          <p:cNvPr id="21" name="Image 1" descr="preencoded.png">    </p:cNvPr>
           <p:cNvPicPr>
             <a:picLocks noChangeAspect="1"/>
           </p:cNvPicPr>
@@ -7367,7 +7574,7 @@
       </p:pic>
       <p:sp>
         <p:nvSpPr>
-          <p:cNvPr id="12" name="Text 8"/>
+          <p:cNvPr id="22" name="Text 18"/>
           <p:cNvSpPr/>
           <p:nvPr/>
         </p:nvSpPr>
